--- a/docs/presentaciones/classes/clase-228-reproducibilidad-seeds-lock-files-versionado-de-datasets-presentacion.pptx
+++ b/docs/presentaciones/classes/clase-228-reproducibilidad-seeds-lock-files-versionado-de-datasets-presentacion.pptx
@@ -3272,7 +3272,7 @@
                 </a:solidFill>
                 <a:latin typeface="Segoe UI"/>
               </a:rPr>
-              <a:t>Parte: 7 — Ética, Fairness y Privacidad · Fuente: Pineau et al., Improving Reproducibility in ML Research (JMLR 2021) + Gebru et al., Datasheets for Datasets (CACM 2021) + Mitchell et al., Model Cards for Model Reporting (FAT* 2019).  Duración estimada: 75 min.</a:t>
+              <a:t>Parte: 7 — Ética, Fairness y Privacidad · Fuente: Pineau et al., Improving Reproducibility in ML Research (JMLR 2021) + Gebru et al., Datasheets for Datasets (CACM 2021) + Mitchell et al., Model Cards for Model Reporting (FAT* 2019).  Duración estimada: 75 min. · Nivel: Intermedio-Avanzado</a:t>
             </a:r>
           </a:p>
         </p:txBody>
@@ -3581,7 +3581,7 @@
                 </a:solidFill>
                 <a:latin typeface="Segoe UI"/>
               </a:rPr>
-              <a:t>Parte: 7 — Ética, Fairness y Privacidad · Fuente: Pineau et al., Improving Reproducibility in ML Research (JMLR 2021) + Gebru et al., Datasheets for Datasets (CACM 2021) + Mitchell et al., Model Cards for Model Reporting (FAT* 2019).  Duración estimada: 75 min.</a:t>
+              <a:t>Parte: 7 — Ética, Fairness y Privacidad · Fuente: Pineau et al., Improving Reproducibility in ML Research (JMLR 2021) + Gebru et al., Datasheets for Datasets (CACM 2021) + Mitchell et al., Model Cards for Model Reporting (FAT* 2019).  Duración estimada: 75 min. · Nivel: Intermedio-Avanzado</a:t>
             </a:r>
           </a:p>
         </p:txBody>
